--- a/Baseline_Presentation.pptx
+++ b/Baseline_Presentation.pptx
@@ -7,8 +7,10 @@
   <p:sldIdLst>
     <p:sldId id="256" r:id="rId7"/>
     <p:sldId id="257" r:id="rId8"/>
-    <p:sldId id="258" r:id="rId9"/>
-    <p:sldId id="259" r:id="rId10"/>
+    <p:sldId id="260" r:id="rId11"/>
+    <p:sldId id="261" r:id="rId12"/>
+    <p:sldId id="262" r:id="rId10"/>
+    <p:sldId id="263" r:id="rId9"/>
   </p:sldIdLst>
   <p:sldSz cx="9144000" cy="6858000" type="screen4x3"/>
   <p:notesSz cx="6858000" cy="9144000"/>
@@ -3315,76 +3317,120 @@
       <p:grpSpPr/>
       <p:sp>
         <p:nvSpPr>
-          <p:cNvPr id="2" name="Title 1"/>
-          <p:cNvSpPr>
-            <a:spLocks noGrp="1"/>
-          </p:cNvSpPr>
-          <p:nvPr>
-            <p:ph type="title"/>
-          </p:nvPr>
-        </p:nvSpPr>
-        <p:spPr/>
-        <p:txBody>
-          <a:bodyPr/>
-          <a:lstStyle/>
-          <a:p>
-            <a:r>
-              <a:t>Efficiency with LoRA (Low-Rank Adaptation)</a:t>
-            </a:r>
-          </a:p>
-        </p:txBody>
-      </p:sp>
-      <p:sp>
-        <p:nvSpPr>
-          <p:cNvPr id="3" name="Content Placeholder 2"/>
-          <p:cNvSpPr>
-            <a:spLocks noGrp="1"/>
-          </p:cNvSpPr>
-          <p:nvPr>
-            <p:ph idx="1"/>
-          </p:nvPr>
-        </p:nvSpPr>
-        <p:spPr/>
-        <p:txBody>
-          <a:bodyPr/>
+          <p:cNvPr id="2" name="TextBox 1"/>
+          <p:cNvSpPr txBox="1"/>
+          <p:nvPr/>
+        </p:nvSpPr>
+        <p:spPr>
+          <a:xfrm>
+            <a:off x="457200" y="365760"/>
+            <a:ext cx="8229600" cy="731520"/>
+          </a:xfrm>
+          <a:prstGeom prst="rect">
+            <a:avLst/>
+          </a:prstGeom>
+          <a:noFill/>
+        </p:spPr>
+        <p:txBody>
+          <a:bodyPr wrap="none">
+            <a:spAutoFit/>
+          </a:bodyPr>
           <a:lstStyle/>
           <a:p>
             <a:pPr>
-              <a:defRPr b="1"/>
-            </a:pPr>
-            <a:r>
-              <a:t>The Problem with Standard Fine-Tuning:</a:t>
-            </a:r>
-          </a:p>
-          <a:p>
-            <a:r>
-              <a:t>- Updating billions of parameters requires massive GPU memory.</a:t>
-            </a:r>
-            <a:br/>
-            <a:r>
-              <a:t>- Slow training times and huge saved model files.</a:t>
-            </a:r>
-          </a:p>
-          <a:p>
-            <a:br/>
+              <a:defRPr sz="5400" b="1">
+                <a:solidFill>
+                  <a:srgbClr val="000000"/>
+                </a:solidFill>
+              </a:defRPr>
+            </a:pPr>
+            <a:r>
+              <a:t>Why Direct RL Over SFT?</a:t>
+            </a:r>
+          </a:p>
+        </p:txBody>
+      </p:sp>
+      <p:sp>
+        <p:nvSpPr>
+          <p:cNvPr id="3" name="TextBox 2"/>
+          <p:cNvSpPr txBox="1"/>
+          <p:nvPr/>
+        </p:nvSpPr>
+        <p:spPr>
+          <a:xfrm>
+            <a:off x="914400" y="1280160"/>
+            <a:ext cx="7315200" cy="4572000"/>
+          </a:xfrm>
+          <a:prstGeom prst="rect">
+            <a:avLst/>
+          </a:prstGeom>
+          <a:noFill/>
+        </p:spPr>
+        <p:txBody>
+          <a:bodyPr wrap="square">
+            <a:spAutoFit/>
+          </a:bodyPr>
+          <a:lstStyle/>
+          <a:p>
             <a:pPr>
-              <a:defRPr b="1"/>
-            </a:pPr>
-            <a:r>
-              <a:t>The LoRA Solution:</a:t>
-            </a:r>
-          </a:p>
-          <a:p>
-            <a:r>
-              <a:t>- Freeze Base Weights: The original model is locked.</a:t>
-            </a:r>
-            <a:br/>
-            <a:r>
-              <a:t>- Add Adapters: Attach tiny trainable 'adapter' layers to the attention mechanism (q_proj, v_proj).</a:t>
-            </a:r>
-            <a:br/>
-            <a:r>
-              <a:t>- Train only Adapters: Dramatically reduces memory usage, speeds up training, and results in a tiny (~20MB) save file.</a:t>
+              <a:defRPr sz="3200"/>
+            </a:pPr>
+            <a:r>
+              <a:t>Computational Efficiency</a:t>
+            </a:r>
+          </a:p>
+          <a:p>
+            <a:pPr lvl="1">
+              <a:defRPr sz="2600"/>
+            </a:pPr>
+            <a:r>
+              <a:t>Skip intermediate SFT stage → direct RL optimization</a:t>
+            </a:r>
+          </a:p>
+          <a:p>
+            <a:pPr>
+              <a:defRPr sz="2600"/>
+            </a:pPr>
+          </a:p>
+          <a:p>
+            <a:pPr>
+              <a:defRPr sz="3200"/>
+            </a:pPr>
+            <a:r>
+              <a:t>Alignment Benefits</a:t>
+            </a:r>
+          </a:p>
+          <a:p>
+            <a:pPr lvl="1">
+              <a:defRPr sz="2600"/>
+            </a:pPr>
+            <a:r>
+              <a:t>Avoid biases from human-curated SFT data</a:t>
+            </a:r>
+          </a:p>
+          <a:p>
+            <a:pPr lvl="1">
+              <a:defRPr sz="2600"/>
+            </a:pPr>
+            <a:r>
+              <a:t>Learn directly from reward signal</a:t>
+            </a:r>
+          </a:p>
+          <a:p>
+            <a:pPr>
+              <a:defRPr sz="2600"/>
+            </a:pPr>
+          </a:p>
+          <a:p>
+            <a:pPr>
+              <a:defRPr sz="1800" i="1">
+                <a:solidFill>
+                  <a:srgbClr val="00008B"/>
+                </a:solidFill>
+              </a:defRPr>
+            </a:pPr>
+            <a:r>
+              <a:t>Reference: https://yugeten.github.io/posts/2025/01/ppogrpo/</a:t>
             </a:r>
           </a:p>
         </p:txBody>
@@ -3409,319 +3455,404 @@
       <p:grpSpPr/>
       <p:sp>
         <p:nvSpPr>
-          <p:cNvPr id="2" name="Title 1"/>
-          <p:cNvSpPr>
-            <a:spLocks noGrp="1"/>
-          </p:cNvSpPr>
-          <p:nvPr>
-            <p:ph type="title"/>
-          </p:nvPr>
-        </p:nvSpPr>
-        <p:spPr/>
-        <p:txBody>
-          <a:bodyPr/>
-          <a:lstStyle/>
-          <a:p>
-            <a:r>
-              <a:t>Pipeline Diagram: Formatting &amp; Training</a:t>
-            </a:r>
-          </a:p>
-        </p:txBody>
-      </p:sp>
-      <p:sp>
-        <p:nvSpPr>
-          <p:cNvPr id="3" name="Rounded Rectangle 2"/>
-          <p:cNvSpPr/>
+          <p:cNvPr id="2" name="TextBox 1"/>
+          <p:cNvSpPr txBox="1"/>
           <p:nvPr/>
         </p:nvSpPr>
         <p:spPr>
           <a:xfrm>
-            <a:off x="457200" y="2286000"/>
-            <a:ext cx="1828800" cy="1097280"/>
+            <a:off x="457200" y="365760"/>
+            <a:ext cx="8229600" cy="731520"/>
           </a:xfrm>
-          <a:prstGeom prst="roundRect">
+          <a:prstGeom prst="rect">
             <a:avLst/>
           </a:prstGeom>
+          <a:noFill/>
         </p:spPr>
-        <p:style>
-          <a:lnRef idx="1">
-            <a:schemeClr val="accent1"/>
-          </a:lnRef>
-          <a:fillRef idx="3">
-            <a:schemeClr val="accent1"/>
-          </a:fillRef>
-          <a:effectRef idx="2">
-            <a:schemeClr val="accent1"/>
-          </a:effectRef>
-          <a:fontRef idx="minor">
-            <a:schemeClr val="lt1"/>
-          </a:fontRef>
-        </p:style>
-        <p:txBody>
-          <a:bodyPr rtlCol="0" anchor="ctr"/>
-          <a:lstStyle/>
-          <a:p>
-            <a:r>
-              <a:t>1. Raw GSM8K Data</a:t>
-            </a:r>
-          </a:p>
-          <a:p>
-            <a:r>
-              <a:t>(Question &amp; Answer)</a:t>
-            </a:r>
-          </a:p>
-        </p:txBody>
-      </p:sp>
-      <p:sp>
-        <p:nvSpPr>
-          <p:cNvPr id="4" name="Right Arrow 3"/>
-          <p:cNvSpPr/>
+        <p:txBody>
+          <a:bodyPr wrap="none">
+            <a:spAutoFit/>
+          </a:bodyPr>
+          <a:lstStyle/>
+          <a:p>
+            <a:pPr>
+              <a:defRPr sz="5400" b="1">
+                <a:solidFill>
+                  <a:srgbClr val="000000"/>
+                </a:solidFill>
+              </a:defRPr>
+            </a:pPr>
+            <a:r>
+              <a:t>GRPO: Eliminating the Critic Network</a:t>
+            </a:r>
+          </a:p>
+        </p:txBody>
+      </p:sp>
+      <p:sp>
+        <p:nvSpPr>
+          <p:cNvPr id="3" name="TextBox 2"/>
+          <p:cNvSpPr txBox="1"/>
           <p:nvPr/>
         </p:nvSpPr>
         <p:spPr>
           <a:xfrm>
-            <a:off x="2377440" y="2651760"/>
-            <a:ext cx="457200" cy="365760"/>
+            <a:off x="914400" y="1280160"/>
+            <a:ext cx="7315200" cy="4572000"/>
           </a:xfrm>
-          <a:prstGeom prst="rightArrow">
+          <a:prstGeom prst="rect">
             <a:avLst/>
           </a:prstGeom>
+          <a:noFill/>
         </p:spPr>
-        <p:style>
-          <a:lnRef idx="1">
-            <a:schemeClr val="accent1"/>
-          </a:lnRef>
-          <a:fillRef idx="3">
-            <a:schemeClr val="accent1"/>
-          </a:fillRef>
-          <a:effectRef idx="2">
-            <a:schemeClr val="accent1"/>
-          </a:effectRef>
-          <a:fontRef idx="minor">
-            <a:schemeClr val="lt1"/>
-          </a:fontRef>
-        </p:style>
-        <p:txBody>
-          <a:bodyPr rtlCol="0" anchor="ctr"/>
-          <a:lstStyle/>
-          <a:p>
-            <a:pPr algn="ctr"/>
-          </a:p>
-        </p:txBody>
-      </p:sp>
-      <p:sp>
-        <p:nvSpPr>
-          <p:cNvPr id="5" name="Rounded Rectangle 4"/>
-          <p:cNvSpPr/>
-          <p:nvPr/>
-        </p:nvSpPr>
-        <p:spPr>
-          <a:xfrm>
-            <a:off x="2926080" y="2286000"/>
-            <a:ext cx="2011680" cy="1097280"/>
-          </a:xfrm>
-          <a:prstGeom prst="roundRect">
-            <a:avLst/>
-          </a:prstGeom>
-        </p:spPr>
-        <p:style>
-          <a:lnRef idx="1">
-            <a:schemeClr val="accent1"/>
-          </a:lnRef>
-          <a:fillRef idx="3">
-            <a:schemeClr val="accent1"/>
-          </a:fillRef>
-          <a:effectRef idx="2">
-            <a:schemeClr val="accent1"/>
-          </a:effectRef>
-          <a:fontRef idx="minor">
-            <a:schemeClr val="lt1"/>
-          </a:fontRef>
-        </p:style>
-        <p:txBody>
-          <a:bodyPr rtlCol="0" anchor="ctr"/>
-          <a:lstStyle/>
-          <a:p>
-            <a:r>
-              <a:t>2. Formatting</a:t>
-            </a:r>
-          </a:p>
-          <a:p>
-            <a:r>
-              <a:t>Concat Q&amp;A, Tokenize</a:t>
-            </a:r>
-          </a:p>
-        </p:txBody>
-      </p:sp>
-      <p:sp>
-        <p:nvSpPr>
-          <p:cNvPr id="6" name="Right Arrow 5"/>
-          <p:cNvSpPr/>
-          <p:nvPr/>
-        </p:nvSpPr>
-        <p:spPr>
-          <a:xfrm>
-            <a:off x="5029200" y="2651760"/>
-            <a:ext cx="457200" cy="365760"/>
-          </a:xfrm>
-          <a:prstGeom prst="rightArrow">
-            <a:avLst/>
-          </a:prstGeom>
-        </p:spPr>
-        <p:style>
-          <a:lnRef idx="1">
-            <a:schemeClr val="accent1"/>
-          </a:lnRef>
-          <a:fillRef idx="3">
-            <a:schemeClr val="accent1"/>
-          </a:fillRef>
-          <a:effectRef idx="2">
-            <a:schemeClr val="accent1"/>
-          </a:effectRef>
-          <a:fontRef idx="minor">
-            <a:schemeClr val="lt1"/>
-          </a:fontRef>
-        </p:style>
-        <p:txBody>
-          <a:bodyPr rtlCol="0" anchor="ctr"/>
-          <a:lstStyle/>
-          <a:p>
-            <a:pPr algn="ctr"/>
-          </a:p>
-        </p:txBody>
-      </p:sp>
-      <p:sp>
-        <p:nvSpPr>
-          <p:cNvPr id="7" name="Rounded Rectangle 6"/>
-          <p:cNvSpPr/>
-          <p:nvPr/>
-        </p:nvSpPr>
-        <p:spPr>
-          <a:xfrm>
-            <a:off x="5577840" y="2286000"/>
-            <a:ext cx="1828800" cy="1097280"/>
-          </a:xfrm>
-          <a:prstGeom prst="roundRect">
-            <a:avLst/>
-          </a:prstGeom>
-        </p:spPr>
-        <p:style>
-          <a:lnRef idx="1">
-            <a:schemeClr val="accent1"/>
-          </a:lnRef>
-          <a:fillRef idx="3">
-            <a:schemeClr val="accent1"/>
-          </a:fillRef>
-          <a:effectRef idx="2">
-            <a:schemeClr val="accent1"/>
-          </a:effectRef>
-          <a:fontRef idx="minor">
-            <a:schemeClr val="lt1"/>
-          </a:fontRef>
-        </p:style>
-        <p:txBody>
-          <a:bodyPr rtlCol="0" anchor="ctr"/>
-          <a:lstStyle/>
-          <a:p>
-            <a:r>
-              <a:t>3. Reward Filter</a:t>
-            </a:r>
-          </a:p>
-          <a:p>
-            <a:r>
-              <a:t>Verify Numeric Answer</a:t>
-            </a:r>
-          </a:p>
-          <a:p>
-            <a:r>
-              <a:t>(Reward = 1.0 or 0.0)</a:t>
-            </a:r>
-          </a:p>
-        </p:txBody>
-      </p:sp>
-      <p:sp>
-        <p:nvSpPr>
-          <p:cNvPr id="8" name="Down Arrow 7"/>
-          <p:cNvSpPr/>
-          <p:nvPr/>
-        </p:nvSpPr>
-        <p:spPr>
-          <a:xfrm>
-            <a:off x="6492240" y="3474720"/>
-            <a:ext cx="365760" cy="548640"/>
-          </a:xfrm>
-          <a:prstGeom prst="downArrow">
-            <a:avLst/>
-          </a:prstGeom>
-        </p:spPr>
-        <p:style>
-          <a:lnRef idx="1">
-            <a:schemeClr val="accent1"/>
-          </a:lnRef>
-          <a:fillRef idx="3">
-            <a:schemeClr val="accent1"/>
-          </a:fillRef>
-          <a:effectRef idx="2">
-            <a:schemeClr val="accent1"/>
-          </a:effectRef>
-          <a:fontRef idx="minor">
-            <a:schemeClr val="lt1"/>
-          </a:fontRef>
-        </p:style>
-        <p:txBody>
-          <a:bodyPr rtlCol="0" anchor="ctr"/>
-          <a:lstStyle/>
-          <a:p>
-            <a:pPr algn="ctr"/>
-          </a:p>
-        </p:txBody>
-      </p:sp>
-      <p:sp>
-        <p:nvSpPr>
-          <p:cNvPr id="9" name="Rounded Rectangle 8"/>
-          <p:cNvSpPr/>
-          <p:nvPr/>
-        </p:nvSpPr>
-        <p:spPr>
-          <a:xfrm>
-            <a:off x="4114800" y="4114800"/>
-            <a:ext cx="3291840" cy="1371600"/>
-          </a:xfrm>
-          <a:prstGeom prst="roundRect">
-            <a:avLst/>
-          </a:prstGeom>
-        </p:spPr>
-        <p:style>
-          <a:lnRef idx="1">
-            <a:schemeClr val="accent1"/>
-          </a:lnRef>
-          <a:fillRef idx="3">
-            <a:schemeClr val="accent1"/>
-          </a:fillRef>
-          <a:effectRef idx="2">
-            <a:schemeClr val="accent1"/>
-          </a:effectRef>
-          <a:fontRef idx="minor">
-            <a:schemeClr val="lt1"/>
-          </a:fontRef>
-        </p:style>
-        <p:txBody>
-          <a:bodyPr rtlCol="0" anchor="ctr"/>
-          <a:lstStyle/>
-          <a:p>
-            <a:r>
-              <a:t>4. Reward-Weighted Trainer</a:t>
-            </a:r>
-          </a:p>
-          <a:p/>
-          <a:p>
-            <a:r>
-              <a:t>Loss = Seq_Loss × Reward</a:t>
-            </a:r>
-          </a:p>
-          <a:p>
-            <a:r>
-              <a:t>Update LoRA Adapters</a:t>
+        <p:txBody>
+          <a:bodyPr wrap="square">
+            <a:spAutoFit/>
+          </a:bodyPr>
+          <a:lstStyle/>
+          <a:p>
+            <a:pPr>
+              <a:defRPr sz="2800"/>
+            </a:pPr>
+            <a:r>
+              <a:t>Traditional RL (PPO): Requires Separate Critic</a:t>
+            </a:r>
+          </a:p>
+          <a:p>
+            <a:pPr lvl="1">
+              <a:defRPr sz="2200"/>
+            </a:pPr>
+            <a:r>
+              <a:t>Critic estimates per-step value function → computational overhead</a:t>
+            </a:r>
+          </a:p>
+          <a:p>
+            <a:pPr>
+              <a:defRPr sz="2200"/>
+            </a:pPr>
+          </a:p>
+          <a:p>
+            <a:pPr>
+              <a:defRPr sz="2800"/>
+            </a:pPr>
+            <a:r>
+              <a:t>GRPO Innovation: Group-Relative Policy Optimization</a:t>
+            </a:r>
+          </a:p>
+          <a:p>
+            <a:pPr lvl="1">
+              <a:defRPr sz="2200"/>
+            </a:pPr>
+            <a:r>
+              <a:t>Advantage = (R(rᵢ) - mean(R)) / std(R)</a:t>
+            </a:r>
+          </a:p>
+          <a:p>
+            <a:pPr lvl="1">
+              <a:defRPr sz="2200"/>
+            </a:pPr>
+            <a:r>
+              <a:t>Normalized within response group → No critic needed!</a:t>
+            </a:r>
+          </a:p>
+          <a:p>
+            <a:pPr>
+              <a:defRPr sz="2200"/>
+            </a:pPr>
+          </a:p>
+          <a:p>
+            <a:pPr>
+              <a:defRPr sz="2800"/>
+            </a:pPr>
+            <a:r>
+              <a:t>Key Benefits</a:t>
+            </a:r>
+          </a:p>
+          <a:p>
+            <a:pPr lvl="1">
+              <a:defRPr sz="2200"/>
+            </a:pPr>
+            <a:r>
+              <a:t>Simpler architecture, no value network overhead</a:t>
+            </a:r>
+          </a:p>
+          <a:p>
+            <a:pPr lvl="1">
+              <a:defRPr sz="2200"/>
+            </a:pPr>
+            <a:r>
+              <a:t>Faster training with same or better results</a:t>
+            </a:r>
+          </a:p>
+          <a:p>
+            <a:pPr lvl="1">
+              <a:defRPr sz="2200"/>
+            </a:pPr>
+            <a:r>
+              <a:t>Mathematical elegance &amp; theoretical soundness</a:t>
+            </a:r>
+          </a:p>
+        </p:txBody>
+      </p:sp>
+    </p:spTree>
+  </p:cSld>
+  <p:clrMapOvr>
+    <a:masterClrMapping/>
+  </p:clrMapOvr>
+</p:sld>
+</file>
+
+<file path=ppt/slides/slide5.xml><?xml version="1.0" encoding="utf-8"?>
+<p:sld xmlns:a="http://schemas.openxmlformats.org/drawingml/2006/main" xmlns:p="http://schemas.openxmlformats.org/presentationml/2006/main" xmlns:r="http://schemas.openxmlformats.org/officeDocument/2006/relationships">
+  <p:cSld>
+    <p:spTree>
+      <p:nvGrpSpPr>
+        <p:cNvPr id="1" name=""/>
+        <p:cNvGrpSpPr/>
+        <p:nvPr/>
+      </p:nvGrpSpPr>
+      <p:grpSpPr/>
+      <p:sp>
+        <p:nvSpPr>
+          <p:cNvPr id="2" name="Title 1"/>
+          <p:cNvSpPr>
+            <a:spLocks noGrp="1"/>
+          </p:cNvSpPr>
+          <p:nvPr>
+            <p:ph type="title"/>
+          </p:nvPr>
+        </p:nvSpPr>
+        <p:spPr/>
+        <p:txBody>
+          <a:bodyPr/>
+          <a:lstStyle/>
+          <a:p>
+            <a:pPr>
+              <a:defRPr sz="5400" b="1"/>
+            </a:pPr>
+            <a:r>
+              <a:t>Why Direct RL Over SFT?</a:t>
+            </a:r>
+          </a:p>
+        </p:txBody>
+      </p:sp>
+      <p:sp>
+        <p:nvSpPr>
+          <p:cNvPr id="3" name="Content Placeholder 2"/>
+          <p:cNvSpPr>
+            <a:spLocks noGrp="1"/>
+          </p:cNvSpPr>
+          <p:nvPr>
+            <p:ph idx="1"/>
+          </p:nvPr>
+        </p:nvSpPr>
+        <p:spPr/>
+        <p:txBody>
+          <a:bodyPr/>
+          <a:lstStyle/>
+          <a:p>
+            <a:pPr>
+              <a:defRPr b="1" sz="2800"/>
+            </a:pPr>
+            <a:r>
+              <a:t>Computational Efficiency</a:t>
+            </a:r>
+          </a:p>
+          <a:p>
+            <a:pPr lvl="1">
+              <a:defRPr b="0" sz="2800"/>
+            </a:pPr>
+            <a:r>
+              <a:t>Skip intermediate SFT stage → direct RL optimization</a:t>
+            </a:r>
+          </a:p>
+          <a:p>
+            <a:pPr>
+              <a:defRPr b="0" sz="2800"/>
+            </a:pPr>
+          </a:p>
+          <a:p>
+            <a:pPr>
+              <a:defRPr b="1" sz="2800"/>
+            </a:pPr>
+            <a:r>
+              <a:t>Alignment Benefits</a:t>
+            </a:r>
+          </a:p>
+          <a:p>
+            <a:pPr lvl="1">
+              <a:defRPr b="0" sz="2800"/>
+            </a:pPr>
+            <a:r>
+              <a:t>Avoid biases from human-curated SFT data</a:t>
+            </a:r>
+          </a:p>
+          <a:p>
+            <a:pPr lvl="1">
+              <a:defRPr b="0" sz="2800"/>
+            </a:pPr>
+            <a:r>
+              <a:t>Learn directly from reward signal</a:t>
+            </a:r>
+          </a:p>
+          <a:p>
+            <a:pPr>
+              <a:defRPr b="0" sz="2800"/>
+            </a:pPr>
+          </a:p>
+          <a:p>
+            <a:pPr>
+              <a:defRPr b="0" sz="2800"/>
+            </a:pPr>
+            <a:r>
+              <a:t>Reference: yugeten.github.io/posts/2025/01/ppogrpo/</a:t>
+            </a:r>
+          </a:p>
+        </p:txBody>
+      </p:sp>
+    </p:spTree>
+  </p:cSld>
+  <p:clrMapOvr>
+    <a:masterClrMapping/>
+  </p:clrMapOvr>
+</p:sld>
+</file>
+
+<file path=ppt/slides/slide6.xml><?xml version="1.0" encoding="utf-8"?>
+<p:sld xmlns:a="http://schemas.openxmlformats.org/drawingml/2006/main" xmlns:p="http://schemas.openxmlformats.org/presentationml/2006/main" xmlns:r="http://schemas.openxmlformats.org/officeDocument/2006/relationships">
+  <p:cSld>
+    <p:spTree>
+      <p:nvGrpSpPr>
+        <p:cNvPr id="1" name=""/>
+        <p:cNvGrpSpPr/>
+        <p:nvPr/>
+      </p:nvGrpSpPr>
+      <p:grpSpPr/>
+      <p:sp>
+        <p:nvSpPr>
+          <p:cNvPr id="2" name="Title 1"/>
+          <p:cNvSpPr>
+            <a:spLocks noGrp="1"/>
+          </p:cNvSpPr>
+          <p:nvPr>
+            <p:ph type="title"/>
+          </p:nvPr>
+        </p:nvSpPr>
+        <p:spPr/>
+        <p:txBody>
+          <a:bodyPr/>
+          <a:lstStyle/>
+          <a:p>
+            <a:pPr>
+              <a:defRPr sz="4400" b="1"/>
+            </a:pPr>
+            <a:r>
+              <a:t>GRPO: Eliminating the Critic Network</a:t>
+            </a:r>
+          </a:p>
+        </p:txBody>
+      </p:sp>
+      <p:sp>
+        <p:nvSpPr>
+          <p:cNvPr id="3" name="Content Placeholder 2"/>
+          <p:cNvSpPr>
+            <a:spLocks noGrp="1"/>
+          </p:cNvSpPr>
+          <p:nvPr>
+            <p:ph idx="1"/>
+          </p:nvPr>
+        </p:nvSpPr>
+        <p:spPr/>
+        <p:txBody>
+          <a:bodyPr/>
+          <a:lstStyle/>
+          <a:p>
+            <a:pPr>
+              <a:defRPr b="1" sz="2600"/>
+            </a:pPr>
+            <a:r>
+              <a:t>Traditional RL (PPO)</a:t>
+            </a:r>
+          </a:p>
+          <a:p>
+            <a:pPr lvl="1">
+              <a:defRPr b="0" sz="2600"/>
+            </a:pPr>
+            <a:r>
+              <a:t>Requires separate critic network</a:t>
+            </a:r>
+          </a:p>
+          <a:p>
+            <a:pPr lvl="1">
+              <a:defRPr b="0" sz="2600"/>
+            </a:pPr>
+            <a:r>
+              <a:t>Per-step value estimation → computational overhead</a:t>
+            </a:r>
+          </a:p>
+          <a:p>
+            <a:pPr>
+              <a:defRPr b="0" sz="2600"/>
+            </a:pPr>
+          </a:p>
+          <a:p>
+            <a:pPr>
+              <a:defRPr b="1" sz="2600"/>
+            </a:pPr>
+            <a:r>
+              <a:t>GRPO: Group-Relative Policy Optimization</a:t>
+            </a:r>
+          </a:p>
+          <a:p>
+            <a:pPr lvl="1">
+              <a:defRPr b="0" sz="2600"/>
+            </a:pPr>
+            <a:r>
+              <a:t>Advantage = (R(rᵢ) - mean(R)) / std(R)</a:t>
+            </a:r>
+          </a:p>
+          <a:p>
+            <a:pPr lvl="1">
+              <a:defRPr b="0" sz="2600"/>
+            </a:pPr>
+            <a:r>
+              <a:t>No critic needed — normalize within group</a:t>
+            </a:r>
+          </a:p>
+          <a:p>
+            <a:pPr>
+              <a:defRPr b="0" sz="2600"/>
+            </a:pPr>
+          </a:p>
+          <a:p>
+            <a:pPr>
+              <a:defRPr b="1" sz="2600"/>
+            </a:pPr>
+            <a:r>
+              <a:t>Key Benefits</a:t>
+            </a:r>
+          </a:p>
+          <a:p>
+            <a:pPr lvl="1">
+              <a:defRPr b="0" sz="2600"/>
+            </a:pPr>
+            <a:r>
+              <a:t>Simpler architecture</a:t>
+            </a:r>
+          </a:p>
+          <a:p>
+            <a:pPr lvl="1">
+              <a:defRPr b="0" sz="2600"/>
+            </a:pPr>
+            <a:r>
+              <a:t>Faster training</a:t>
+            </a:r>
+          </a:p>
+          <a:p>
+            <a:pPr lvl="1">
+              <a:defRPr b="0" sz="2600"/>
+            </a:pPr>
+            <a:r>
+              <a:t>Mathematical elegance</a:t>
             </a:r>
           </a:p>
         </p:txBody>

--- a/Baseline_Presentation.pptx
+++ b/Baseline_Presentation.pptx
@@ -11,6 +11,7 @@
     <p:sldId id="261" r:id="rId12"/>
     <p:sldId id="262" r:id="rId10"/>
     <p:sldId id="263" r:id="rId9"/>
+    <p:sldId id="264" r:id="rId13"/>
   </p:sldIdLst>
   <p:sldSz cx="9144000" cy="6858000" type="screen4x3"/>
   <p:notesSz cx="6858000" cy="9144000"/>
@@ -3853,6 +3854,345 @@
             </a:pPr>
             <a:r>
               <a:t>Mathematical elegance</a:t>
+            </a:r>
+          </a:p>
+        </p:txBody>
+      </p:sp>
+    </p:spTree>
+  </p:cSld>
+  <p:clrMapOvr>
+    <a:masterClrMapping/>
+  </p:clrMapOvr>
+</p:sld>
+</file>
+
+<file path=ppt/slides/slide7.xml><?xml version="1.0" encoding="utf-8"?>
+<p:sld xmlns:a="http://schemas.openxmlformats.org/drawingml/2006/main" xmlns:p="http://schemas.openxmlformats.org/presentationml/2006/main" xmlns:r="http://schemas.openxmlformats.org/officeDocument/2006/relationships">
+  <p:cSld>
+    <p:spTree>
+      <p:nvGrpSpPr>
+        <p:cNvPr id="1" name=""/>
+        <p:cNvGrpSpPr/>
+        <p:nvPr/>
+      </p:nvGrpSpPr>
+      <p:grpSpPr/>
+      <p:sp>
+        <p:nvSpPr>
+          <p:cNvPr id="2" name="Title 1"/>
+          <p:cNvSpPr>
+            <a:spLocks noGrp="1"/>
+          </p:cNvSpPr>
+          <p:nvPr>
+            <p:ph type="title"/>
+          </p:nvPr>
+        </p:nvSpPr>
+        <p:spPr/>
+        <p:txBody>
+          <a:bodyPr/>
+          <a:lstStyle/>
+          <a:p>
+            <a:pPr>
+              <a:defRPr sz="4000"/>
+            </a:pPr>
+            <a:r>
+              <a:t>Router Reward: Binary Outcome vs. Process-Based</a:t>
+            </a:r>
+          </a:p>
+        </p:txBody>
+      </p:sp>
+      <p:sp>
+        <p:nvSpPr>
+          <p:cNvPr id="3" name="Content Placeholder 2"/>
+          <p:cNvSpPr>
+            <a:spLocks noGrp="1"/>
+          </p:cNvSpPr>
+          <p:nvPr>
+            <p:ph idx="1"/>
+          </p:nvPr>
+        </p:nvSpPr>
+        <p:spPr/>
+        <p:txBody>
+          <a:bodyPr wrap="square"/>
+          <a:lstStyle/>
+          <a:p>
+            <a:pPr>
+              <a:defRPr b="1" sz="1800"/>
+            </a:pPr>
+            <a:r>
+              <a:t>1. Outcome-Only (Current)</a:t>
+            </a:r>
+          </a:p>
+          <a:p>
+            <a:pPr lvl="1">
+              <a:defRPr sz="1200"/>
+            </a:pPr>
+            <a:r>
+              <a:t>Reward = 1 if final answer matches ground truth</a:t>
+            </a:r>
+          </a:p>
+          <a:p>
+            <a:pPr lvl="1">
+              <a:defRPr sz="1200"/>
+            </a:pPr>
+            <a:r>
+              <a:t>Reward = 0 if answer is incorrect</a:t>
+            </a:r>
+          </a:p>
+          <a:p>
+            <a:pPr lvl="1">
+              <a:defRPr sz="1200"/>
+            </a:pPr>
+            <a:r>
+              <a:t>Ignores planning quality—only cares about result</a:t>
+            </a:r>
+          </a:p>
+          <a:p>
+            <a:pPr lvl="1">
+              <a:defRPr sz="1200"/>
+            </a:pPr>
+            <a:r>
+              <a:t>Advantage: Simple, easy to implement</a:t>
+            </a:r>
+          </a:p>
+          <a:p>
+            <a:pPr lvl="1">
+              <a:defRPr sz="1200"/>
+            </a:pPr>
+            <a:r>
+              <a:t>Disadvantage: No feedback on intermediate reasoning</a:t>
+            </a:r>
+          </a:p>
+          <a:p>
+            <a:pPr>
+              <a:defRPr b="1" sz="1800"/>
+            </a:pPr>
+            <a:r>
+              <a:t>2. Process Reward Models (PRM) [1]</a:t>
+            </a:r>
+          </a:p>
+          <a:p>
+            <a:pPr lvl="1">
+              <a:defRPr sz="1200"/>
+            </a:pPr>
+            <a:r>
+              <a:t>Score quality of each planning step independently</a:t>
+            </a:r>
+          </a:p>
+          <a:p>
+            <a:pPr lvl="1">
+              <a:defRPr sz="1200"/>
+            </a:pPr>
+            <a:r>
+              <a:t>Each step evaluated on: clarity, concreteness, logical order</a:t>
+            </a:r>
+          </a:p>
+          <a:p>
+            <a:pPr lvl="1">
+              <a:defRPr sz="1200"/>
+            </a:pPr>
+            <a:r>
+              <a:t>Separates 'good planning' from 'successful execution'</a:t>
+            </a:r>
+          </a:p>
+          <a:p>
+            <a:pPr lvl="1">
+              <a:defRPr sz="1200"/>
+            </a:pPr>
+            <a:r>
+              <a:t>Advantage: Detects poor plans early, reduces reward hacking</a:t>
+            </a:r>
+          </a:p>
+          <a:p>
+            <a:pPr lvl="1">
+              <a:defRPr sz="1200"/>
+            </a:pPr>
+            <a:r>
+              <a:t>Disadvantage: Requires step-level quality metrics</a:t>
+            </a:r>
+          </a:p>
+          <a:p>
+            <a:pPr>
+              <a:defRPr b="1" sz="1800"/>
+            </a:pPr>
+            <a:r>
+              <a:t>3. Conditional Reward Modeling (CRM) [3]</a:t>
+            </a:r>
+          </a:p>
+          <a:p>
+            <a:pPr lvl="1">
+              <a:defRPr sz="1200"/>
+            </a:pPr>
+            <a:r>
+              <a:t>Theoretically sound = plan would work if executed perfectly</a:t>
+            </a:r>
+          </a:p>
+          <a:p>
+            <a:pPr lvl="1">
+              <a:defRPr sz="1200"/>
+            </a:pPr>
+            <a:r>
+              <a:t>Checks: mentions all quantities? Logical order? Decomposition correct?</a:t>
+            </a:r>
+          </a:p>
+          <a:p>
+            <a:pPr lvl="1">
+              <a:defRPr sz="1200"/>
+            </a:pPr>
+            <a:r>
+              <a:t>Conditions step rewards on preceding steps AND final outcome</a:t>
+            </a:r>
+          </a:p>
+          <a:p>
+            <a:pPr lvl="1">
+              <a:defRPr sz="1200"/>
+            </a:pPr>
+            <a:r>
+              <a:t>Advantage: Captures inter-step dependencies, reduces reward hacking</a:t>
+            </a:r>
+          </a:p>
+          <a:p>
+            <a:pPr lvl="1">
+              <a:defRPr sz="1200"/>
+            </a:pPr>
+            <a:r>
+              <a:t>Disadvantage: More complex credit assignment logic</a:t>
+            </a:r>
+          </a:p>
+          <a:p>
+            <a:pPr>
+              <a:defRPr b="1" sz="1800"/>
+            </a:pPr>
+            <a:r>
+              <a:t>4. Hybrid Approach [1][2]</a:t>
+            </a:r>
+          </a:p>
+          <a:p>
+            <a:pPr lvl="1">
+              <a:defRPr sz="1200"/>
+            </a:pPr>
+            <a:r>
+              <a:t>Reward = 0.5 × plan_quality + 0.5 × outcome_correctness</a:t>
+            </a:r>
+          </a:p>
+          <a:p>
+            <a:pPr lvl="1">
+              <a:defRPr sz="1200"/>
+            </a:pPr>
+            <a:r>
+              <a:t>Balances process (structure/clarity) with outcome (correctness)</a:t>
+            </a:r>
+          </a:p>
+          <a:p>
+            <a:pPr lvl="1">
+              <a:defRPr sz="1200"/>
+            </a:pPr>
+            <a:r>
+              <a:t>Plan quality: step concreteness, logical ordering, clarity</a:t>
+            </a:r>
+          </a:p>
+          <a:p>
+            <a:pPr lvl="1">
+              <a:defRPr sz="1200"/>
+            </a:pPr>
+            <a:r>
+              <a:t>Advantage: Smoother learning, intermediate credit for good plans</a:t>
+            </a:r>
+          </a:p>
+          <a:p>
+            <a:pPr lvl="1">
+              <a:defRPr sz="1200"/>
+            </a:pPr>
+            <a:r>
+              <a:t>Recommendation: Start here—lowest implementation cost, proven effective</a:t>
+            </a:r>
+          </a:p>
+          <a:p>
+            <a:pPr/>
+          </a:p>
+          <a:p>
+            <a:pPr>
+              <a:defRPr b="1" sz="1300">
+                <a:solidFill>
+                  <a:srgbClr val="323232"/>
+                </a:solidFill>
+              </a:defRPr>
+            </a:pPr>
+            <a:r>
+              <a:t>References:</a:t>
+            </a:r>
+          </a:p>
+          <a:p>
+            <a:pPr>
+              <a:defRPr sz="1000">
+                <a:solidFill>
+                  <a:srgbClr val="505050"/>
+                </a:solidFill>
+              </a:defRPr>
+            </a:pPr>
+            <a:r>
+              <a:t>[1] ReST-MCTS*: LLM Self-Training via Process Reward Guided Tree Search</a:t>
+            </a:r>
+          </a:p>
+          <a:p>
+            <a:pPr lvl="1">
+              <a:defRPr sz="1000">
+                <a:solidFill>
+                  <a:srgbClr val="505050"/>
+                </a:solidFill>
+              </a:defRPr>
+            </a:pPr>
+            <a:r>
+              <a:t>     Zhang et al., NeurIPS 2024 | arxiv.org/abs/2406.03816</a:t>
+            </a:r>
+          </a:p>
+          <a:p/>
+          <a:p>
+            <a:pPr>
+              <a:defRPr sz="1000">
+                <a:solidFill>
+                  <a:srgbClr val="505050"/>
+                </a:solidFill>
+              </a:defRPr>
+            </a:pPr>
+            <a:r>
+              <a:t>[2] HiPRAG: Hierarchical Process Rewards for Efficient Agentic RAG</a:t>
+            </a:r>
+          </a:p>
+          <a:p>
+            <a:pPr lvl="1">
+              <a:defRPr sz="1000">
+                <a:solidFill>
+                  <a:srgbClr val="505050"/>
+                </a:solidFill>
+              </a:defRPr>
+            </a:pPr>
+            <a:r>
+              <a:t>     2024 | arxiv.org/abs/2510.07794</a:t>
+            </a:r>
+          </a:p>
+          <a:p/>
+          <a:p>
+            <a:pPr>
+              <a:defRPr sz="1000">
+                <a:solidFill>
+                  <a:srgbClr val="505050"/>
+                </a:solidFill>
+              </a:defRPr>
+            </a:pPr>
+            <a:r>
+              <a:t>[3] Linking Process to Outcome: Conditional Reward Modeling for LLM Reasoning</a:t>
+            </a:r>
+          </a:p>
+          <a:p>
+            <a:pPr lvl="1">
+              <a:defRPr sz="1000">
+                <a:solidFill>
+                  <a:srgbClr val="505050"/>
+                </a:solidFill>
+              </a:defRPr>
+            </a:pPr>
+            <a:r>
+              <a:t>     2024 | arxiv.org/abs/2509.26578</a:t>
             </a:r>
           </a:p>
         </p:txBody>

--- a/Baseline_Presentation.pptx
+++ b/Baseline_Presentation.pptx
@@ -12,6 +12,7 @@
     <p:sldId id="262" r:id="rId10"/>
     <p:sldId id="263" r:id="rId9"/>
     <p:sldId id="264" r:id="rId13"/>
+    <p:sldId id="265" r:id="rId14"/>
   </p:sldIdLst>
   <p:sldSz cx="9144000" cy="6858000" type="screen4x3"/>
   <p:notesSz cx="6858000" cy="9144000"/>
@@ -4193,6 +4194,256 @@
             </a:pPr>
             <a:r>
               <a:t>     2024 | arxiv.org/abs/2509.26578</a:t>
+            </a:r>
+          </a:p>
+        </p:txBody>
+      </p:sp>
+    </p:spTree>
+  </p:cSld>
+  <p:clrMapOvr>
+    <a:masterClrMapping/>
+  </p:clrMapOvr>
+</p:sld>
+</file>
+
+<file path=ppt/slides/slide8.xml><?xml version="1.0" encoding="utf-8"?>
+<p:sld xmlns:a="http://schemas.openxmlformats.org/drawingml/2006/main" xmlns:p="http://schemas.openxmlformats.org/presentationml/2006/main" xmlns:r="http://schemas.openxmlformats.org/officeDocument/2006/relationships">
+  <p:cSld>
+    <p:spTree>
+      <p:nvGrpSpPr>
+        <p:cNvPr id="1" name=""/>
+        <p:cNvGrpSpPr/>
+        <p:nvPr/>
+      </p:nvGrpSpPr>
+      <p:grpSpPr/>
+      <p:sp>
+        <p:nvSpPr>
+          <p:cNvPr id="2" name="Title 1"/>
+          <p:cNvSpPr>
+            <a:spLocks noGrp="1"/>
+          </p:cNvSpPr>
+          <p:nvPr>
+            <p:ph type="title"/>
+          </p:nvPr>
+        </p:nvSpPr>
+        <p:spPr/>
+        <p:txBody>
+          <a:bodyPr/>
+          <a:lstStyle/>
+          <a:p>
+            <a:r>
+              <a:t>LLM-as-Judge: Expert Reward Evaluation</a:t>
+            </a:r>
+          </a:p>
+        </p:txBody>
+      </p:sp>
+      <p:sp>
+        <p:nvSpPr>
+          <p:cNvPr id="3" name="Content Placeholder 2"/>
+          <p:cNvSpPr>
+            <a:spLocks noGrp="1"/>
+          </p:cNvSpPr>
+          <p:nvPr>
+            <p:ph idx="1"/>
+          </p:nvPr>
+        </p:nvSpPr>
+        <p:spPr/>
+        <p:txBody>
+          <a:bodyPr/>
+          <a:lstStyle/>
+          <a:p>
+            <a:pPr>
+              <a:defRPr b="1" sz="2000"/>
+            </a:pPr>
+            <a:r>
+              <a:t>Concept: Use Claude to score plan quality as an expert judge</a:t>
+            </a:r>
+          </a:p>
+          <a:p>
+            <a:pPr>
+              <a:defRPr b="1" sz="1600"/>
+            </a:pPr>
+            <a:r>
+              <a:t>How It Works</a:t>
+            </a:r>
+          </a:p>
+          <a:p>
+            <a:pPr lvl="1">
+              <a:defRPr sz="1200"/>
+            </a:pPr>
+            <a:r>
+              <a:t>Router generates a plan (JSON with steps)</a:t>
+            </a:r>
+          </a:p>
+          <a:p>
+            <a:pPr lvl="1">
+              <a:defRPr sz="1200"/>
+            </a:pPr>
+            <a:r>
+              <a:t>Send plan + question to Claude with evaluation prompt</a:t>
+            </a:r>
+          </a:p>
+          <a:p>
+            <a:pPr lvl="1">
+              <a:defRPr sz="1200"/>
+            </a:pPr>
+            <a:r>
+              <a:t>Claude scores plan 0-10 on clarity, completeness, feasibility</a:t>
+            </a:r>
+          </a:p>
+          <a:p>
+            <a:pPr lvl="1">
+              <a:defRPr sz="1200"/>
+            </a:pPr>
+            <a:r>
+              <a:t>Convert score to 0.0-1.0 and blend: 0.5×judge_score + 0.5×outcome</a:t>
+            </a:r>
+          </a:p>
+          <a:p>
+            <a:pPr>
+              <a:defRPr b="1" sz="1600"/>
+            </a:pPr>
+            <a:r>
+              <a:t>Advantages</a:t>
+            </a:r>
+          </a:p>
+          <a:p>
+            <a:pPr lvl="1">
+              <a:defRPr sz="1200"/>
+            </a:pPr>
+            <a:r>
+              <a:t>Expert-quality evaluation (Claude understands math)</a:t>
+            </a:r>
+          </a:p>
+          <a:p>
+            <a:pPr lvl="1">
+              <a:defRPr sz="1200"/>
+            </a:pPr>
+            <a:r>
+              <a:t>Catches subtle plan issues heuristics miss</a:t>
+            </a:r>
+          </a:p>
+          <a:p>
+            <a:pPr lvl="1">
+              <a:defRPr sz="1200"/>
+            </a:pPr>
+            <a:r>
+              <a:t>Language/domain agnostic</a:t>
+            </a:r>
+          </a:p>
+          <a:p>
+            <a:pPr lvl="1">
+              <a:defRPr sz="1200"/>
+            </a:pPr>
+            <a:r>
+              <a:t>No training required</a:t>
+            </a:r>
+          </a:p>
+          <a:p>
+            <a:pPr>
+              <a:defRPr b="1" sz="1600"/>
+            </a:pPr>
+            <a:r>
+              <a:t>Limitations</a:t>
+            </a:r>
+          </a:p>
+          <a:p>
+            <a:pPr lvl="1">
+              <a:defRPr sz="1200"/>
+            </a:pPr>
+            <a:r>
+              <a:t>Slower: API call per plan (~0.5-2s)</a:t>
+            </a:r>
+          </a:p>
+          <a:p>
+            <a:pPr lvl="1">
+              <a:defRPr sz="1200"/>
+            </a:pPr>
+            <a:r>
+              <a:t>Costs: ~$0.01-0.05 per evaluation</a:t>
+            </a:r>
+          </a:p>
+          <a:p>
+            <a:pPr lvl="1">
+              <a:defRPr sz="1200"/>
+            </a:pPr>
+            <a:r>
+              <a:t>Non-deterministic: slight variation between calls</a:t>
+            </a:r>
+          </a:p>
+          <a:p>
+            <a:pPr lvl="1">
+              <a:defRPr sz="1200"/>
+            </a:pPr>
+            <a:r>
+              <a:t>Best for validation, not high-volume training</a:t>
+            </a:r>
+          </a:p>
+          <a:p>
+            <a:pPr>
+              <a:defRPr b="1" sz="1600"/>
+            </a:pPr>
+            <a:r>
+              <a:t>Recommendation</a:t>
+            </a:r>
+          </a:p>
+          <a:p>
+            <a:pPr lvl="1">
+              <a:defRPr sz="1200"/>
+            </a:pPr>
+            <a:r>
+              <a:t>Train with HeuristicRouterReward (fast, free)</a:t>
+            </a:r>
+          </a:p>
+          <a:p>
+            <a:pPr lvl="1">
+              <a:defRPr sz="1200"/>
+            </a:pPr>
+            <a:r>
+              <a:t>Validate with LLMJudgeRouterReward (expert quality)</a:t>
+            </a:r>
+          </a:p>
+          <a:p>
+            <a:pPr lvl="1">
+              <a:defRPr sz="1200"/>
+            </a:pPr>
+            <a:r>
+              <a:t>Compare scores to detect reward inflation/deflation</a:t>
+            </a:r>
+          </a:p>
+          <a:p>
+            <a:pPr lvl="1">
+              <a:defRPr sz="1200"/>
+            </a:pPr>
+            <a:r>
+              <a:t>Use modular RouterReward class to swap evaluators</a:t>
+            </a:r>
+          </a:p>
+          <a:p>
+            <a:pPr/>
+          </a:p>
+          <a:p>
+            <a:pPr>
+              <a:defRPr sz="1000" i="1">
+                <a:solidFill>
+                  <a:srgbClr val="646464"/>
+                </a:solidFill>
+              </a:defRPr>
+            </a:pPr>
+            <a:r>
+              <a:t>Usage: from src.rewards.router import LLMJudgeRouterReward</a:t>
+            </a:r>
+          </a:p>
+          <a:p>
+            <a:pPr>
+              <a:defRPr sz="1000" i="1">
+                <a:solidFill>
+                  <a:srgbClr val="646464"/>
+                </a:solidFill>
+              </a:defRPr>
+            </a:pPr>
+            <a:r>
+              <a:t>evaluator = LLMJudgeRouterReward(model='claude-opus-4-1')</a:t>
             </a:r>
           </a:p>
         </p:txBody>

--- a/Baseline_Presentation.pptx
+++ b/Baseline_Presentation.pptx
@@ -13,6 +13,7 @@
     <p:sldId id="263" r:id="rId9"/>
     <p:sldId id="264" r:id="rId13"/>
     <p:sldId id="265" r:id="rId14"/>
+    <p:sldId id="266" r:id="rId15"/>
   </p:sldIdLst>
   <p:sldSz cx="9144000" cy="6858000" type="screen4x3"/>
   <p:notesSz cx="6858000" cy="9144000"/>
@@ -4444,6 +4445,243 @@
             </a:pPr>
             <a:r>
               <a:t>evaluator = LLMJudgeRouterReward(model='claude-opus-4-1')</a:t>
+            </a:r>
+          </a:p>
+        </p:txBody>
+      </p:sp>
+    </p:spTree>
+  </p:cSld>
+  <p:clrMapOvr>
+    <a:masterClrMapping/>
+  </p:clrMapOvr>
+</p:sld>
+</file>
+
+<file path=ppt/slides/slide9.xml><?xml version="1.0" encoding="utf-8"?>
+<p:sld xmlns:a="http://schemas.openxmlformats.org/drawingml/2006/main" xmlns:p="http://schemas.openxmlformats.org/presentationml/2006/main" xmlns:r="http://schemas.openxmlformats.org/officeDocument/2006/relationships">
+  <p:cSld>
+    <p:spTree>
+      <p:nvGrpSpPr>
+        <p:cNvPr id="1" name=""/>
+        <p:cNvGrpSpPr/>
+        <p:nvPr/>
+      </p:nvGrpSpPr>
+      <p:grpSpPr/>
+      <p:sp>
+        <p:nvSpPr>
+          <p:cNvPr id="2" name="Title 1"/>
+          <p:cNvSpPr>
+            <a:spLocks noGrp="1"/>
+          </p:cNvSpPr>
+          <p:nvPr>
+            <p:ph type="title"/>
+          </p:nvPr>
+        </p:nvSpPr>
+        <p:spPr/>
+        <p:txBody>
+          <a:bodyPr/>
+          <a:lstStyle/>
+          <a:p>
+            <a:r>
+              <a:t>Solver Rewards: Incentivizing Tool Use</a:t>
+            </a:r>
+          </a:p>
+        </p:txBody>
+      </p:sp>
+      <p:sp>
+        <p:nvSpPr>
+          <p:cNvPr id="3" name="Content Placeholder 2"/>
+          <p:cNvSpPr>
+            <a:spLocks noGrp="1"/>
+          </p:cNvSpPr>
+          <p:nvPr>
+            <p:ph idx="1"/>
+          </p:nvPr>
+        </p:nvSpPr>
+        <p:spPr/>
+        <p:txBody>
+          <a:bodyPr/>
+          <a:lstStyle/>
+          <a:p>
+            <a:pPr>
+              <a:defRPr b="1" sz="2000"/>
+            </a:pPr>
+            <a:r>
+              <a:t>Three-Part Incentive Chain for Code Execution</a:t>
+            </a:r>
+          </a:p>
+          <a:p>
+            <a:pPr>
+              <a:defRPr b="1" sz="1600"/>
+            </a:pPr>
+            <a:r>
+              <a:t>1. Prompt (Instruction)</a:t>
+            </a:r>
+          </a:p>
+          <a:p>
+            <a:pPr lvl="1">
+              <a:defRPr sz="1300"/>
+            </a:pPr>
+            <a:r>
+              <a:t>Solver prompt explicitly states:</a:t>
+            </a:r>
+          </a:p>
+          <a:p>
+            <a:pPr lvl="1">
+              <a:defRPr sz="1300"/>
+            </a:pPr>
+            <a:r>
+              <a:t>"Write Python code wrapped in &lt;code&gt;...&lt;/code&gt;"</a:t>
+            </a:r>
+          </a:p>
+          <a:p>
+            <a:pPr lvl="1">
+              <a:defRPr sz="1300"/>
+            </a:pPr>
+            <a:r>
+              <a:t>Provides inductive bias toward tool use</a:t>
+            </a:r>
+          </a:p>
+          <a:p>
+            <a:pPr>
+              <a:defRPr b="1" sz="1600"/>
+            </a:pPr>
+            <a:r>
+              <a:t>2. Extraction (Architecture)</a:t>
+            </a:r>
+          </a:p>
+          <a:p>
+            <a:pPr lvl="1">
+              <a:defRPr sz="1300"/>
+            </a:pPr>
+            <a:r>
+              <a:t>Only code in &lt;code&gt;...&lt;/code&gt; blocks is extracted</a:t>
+            </a:r>
+          </a:p>
+          <a:p>
+            <a:pPr lvl="1">
+              <a:defRPr sz="1300"/>
+            </a:pPr>
+            <a:r>
+              <a:t>No code found → tool_result.is_error = True</a:t>
+            </a:r>
+          </a:p>
+          <a:p>
+            <a:pPr lvl="1">
+              <a:defRPr sz="1300"/>
+            </a:pPr>
+            <a:r>
+              <a:t>This architectural choice enforces code writing</a:t>
+            </a:r>
+          </a:p>
+          <a:p>
+            <a:pPr>
+              <a:defRPr b="1" sz="1600"/>
+            </a:pPr>
+            <a:r>
+              <a:t>3. Reward (Loss Signal)</a:t>
+            </a:r>
+          </a:p>
+          <a:p>
+            <a:pPr lvl="1">
+              <a:defRPr sz="1300"/>
+            </a:pPr>
+            <a:r>
+              <a:t>No code written → is_error=True → reward = 0.0</a:t>
+            </a:r>
+          </a:p>
+          <a:p>
+            <a:pPr lvl="1">
+              <a:defRPr sz="1300"/>
+            </a:pPr>
+            <a:r>
+              <a:t>Code executes cleanly → 0.3 + 0.2 + 0.5 = up to 1.0</a:t>
+            </a:r>
+          </a:p>
+          <a:p>
+            <a:pPr lvl="1">
+              <a:defRPr sz="1300"/>
+            </a:pPr>
+            <a:r>
+              <a:t>Stark difference forces strong learning signal</a:t>
+            </a:r>
+          </a:p>
+          <a:p>
+            <a:pPr/>
+          </a:p>
+          <a:p>
+            <a:pPr>
+              <a:defRPr b="1" sz="1600"/>
+            </a:pPr>
+            <a:r>
+              <a:t>Solver Step Reward Breakdown (0.0-1.0)</a:t>
+            </a:r>
+          </a:p>
+          <a:p>
+            <a:pPr lvl="1">
+              <a:defRPr sz="1300"/>
+            </a:pPr>
+            <a:r>
+              <a:t>0.3 — Tool executed without Python error</a:t>
+            </a:r>
+          </a:p>
+          <a:p>
+            <a:pPr lvl="1">
+              <a:defRPr sz="1300"/>
+            </a:pPr>
+            <a:r>
+              <a:t>0.2 — Output is sensible (non-empty, &lt; 256 chars)</a:t>
+            </a:r>
+          </a:p>
+          <a:p>
+            <a:pPr lvl="1">
+              <a:defRPr sz="1300"/>
+            </a:pPr>
+            <a:r>
+              <a:t>0.5 — Final answer is correct (outcome signal)</a:t>
+            </a:r>
+          </a:p>
+          <a:p>
+            <a:pPr/>
+          </a:p>
+          <a:p>
+            <a:pPr>
+              <a:defRPr b="1" sz="1600"/>
+            </a:pPr>
+            <a:r>
+              <a:t>Why This Design?</a:t>
+            </a:r>
+          </a:p>
+          <a:p>
+            <a:pPr lvl="1">
+              <a:defRPr sz="1300"/>
+            </a:pPr>
+            <a:r>
+              <a:t>Forces verifiable computation: code either runs or fails</a:t>
+            </a:r>
+          </a:p>
+          <a:p>
+            <a:pPr lvl="1">
+              <a:defRPr sz="1300"/>
+            </a:pPr>
+            <a:r>
+              <a:t>Avoids ambiguity: prose answers can be interpreted many ways</a:t>
+            </a:r>
+          </a:p>
+          <a:p>
+            <a:pPr lvl="1">
+              <a:defRPr sz="1300"/>
+            </a:pPr>
+            <a:r>
+              <a:t>Enables debugging: can inspect tool outputs and errors</a:t>
+            </a:r>
+          </a:p>
+          <a:p>
+            <a:pPr lvl="1">
+              <a:defRPr sz="1300"/>
+            </a:pPr>
+            <a:r>
+              <a:t>Prevents hallucination: LLM can't claim arbitrary answers</a:t>
             </a:r>
           </a:p>
         </p:txBody>
